--- a/Presentation/AMMCS PREZZY.pptx
+++ b/Presentation/AMMCS PREZZY.pptx
@@ -5,7 +5,7 @@
     <p:sldMasterId id="2147483648" r:id="rId1"/>
   </p:sldMasterIdLst>
   <p:notesMasterIdLst>
-    <p:notesMasterId r:id="rId17"/>
+    <p:notesMasterId r:id="rId34"/>
   </p:notesMasterIdLst>
   <p:sldIdLst>
     <p:sldId id="256" r:id="rId2"/>
@@ -23,6 +23,23 @@
     <p:sldId id="268" r:id="rId14"/>
     <p:sldId id="270" r:id="rId15"/>
     <p:sldId id="269" r:id="rId16"/>
+    <p:sldId id="271" r:id="rId17"/>
+    <p:sldId id="272" r:id="rId18"/>
+    <p:sldId id="273" r:id="rId19"/>
+    <p:sldId id="274" r:id="rId20"/>
+    <p:sldId id="275" r:id="rId21"/>
+    <p:sldId id="276" r:id="rId22"/>
+    <p:sldId id="277" r:id="rId23"/>
+    <p:sldId id="279" r:id="rId24"/>
+    <p:sldId id="282" r:id="rId25"/>
+    <p:sldId id="278" r:id="rId26"/>
+    <p:sldId id="280" r:id="rId27"/>
+    <p:sldId id="281" r:id="rId28"/>
+    <p:sldId id="283" r:id="rId29"/>
+    <p:sldId id="284" r:id="rId30"/>
+    <p:sldId id="285" r:id="rId31"/>
+    <p:sldId id="286" r:id="rId32"/>
+    <p:sldId id="287" r:id="rId33"/>
   </p:sldIdLst>
   <p:sldSz cx="12192000" cy="6858000"/>
   <p:notesSz cx="6858000" cy="9144000"/>
@@ -723,7 +740,7 @@
           <a:p>
             <a:fld id="{4284316B-64AA-40B5-9952-441143FFA226}" type="datetimeFigureOut">
               <a:rPr lang="en-US" smtClean="0"/>
-              <a:t>8/10/2026</a:t>
+              <a:t>8/11/2026</a:t>
             </a:fld>
             <a:endParaRPr lang="en-US"/>
           </a:p>
@@ -921,7 +938,7 @@
           <a:p>
             <a:fld id="{4284316B-64AA-40B5-9952-441143FFA226}" type="datetimeFigureOut">
               <a:rPr lang="en-US" smtClean="0"/>
-              <a:t>8/10/2026</a:t>
+              <a:t>8/11/2026</a:t>
             </a:fld>
             <a:endParaRPr lang="en-US"/>
           </a:p>
@@ -1129,7 +1146,7 @@
           <a:p>
             <a:fld id="{4284316B-64AA-40B5-9952-441143FFA226}" type="datetimeFigureOut">
               <a:rPr lang="en-US" smtClean="0"/>
-              <a:t>8/10/2026</a:t>
+              <a:t>8/11/2026</a:t>
             </a:fld>
             <a:endParaRPr lang="en-US"/>
           </a:p>
@@ -1327,7 +1344,7 @@
           <a:p>
             <a:fld id="{4284316B-64AA-40B5-9952-441143FFA226}" type="datetimeFigureOut">
               <a:rPr lang="en-US" smtClean="0"/>
-              <a:t>8/10/2026</a:t>
+              <a:t>8/11/2026</a:t>
             </a:fld>
             <a:endParaRPr lang="en-US"/>
           </a:p>
@@ -1602,7 +1619,7 @@
           <a:p>
             <a:fld id="{4284316B-64AA-40B5-9952-441143FFA226}" type="datetimeFigureOut">
               <a:rPr lang="en-US" smtClean="0"/>
-              <a:t>8/10/2026</a:t>
+              <a:t>8/11/2026</a:t>
             </a:fld>
             <a:endParaRPr lang="en-US"/>
           </a:p>
@@ -1867,7 +1884,7 @@
           <a:p>
             <a:fld id="{4284316B-64AA-40B5-9952-441143FFA226}" type="datetimeFigureOut">
               <a:rPr lang="en-US" smtClean="0"/>
-              <a:t>8/10/2026</a:t>
+              <a:t>8/11/2026</a:t>
             </a:fld>
             <a:endParaRPr lang="en-US"/>
           </a:p>
@@ -2279,7 +2296,7 @@
           <a:p>
             <a:fld id="{4284316B-64AA-40B5-9952-441143FFA226}" type="datetimeFigureOut">
               <a:rPr lang="en-US" smtClean="0"/>
-              <a:t>8/10/2026</a:t>
+              <a:t>8/11/2026</a:t>
             </a:fld>
             <a:endParaRPr lang="en-US"/>
           </a:p>
@@ -2420,7 +2437,7 @@
           <a:p>
             <a:fld id="{4284316B-64AA-40B5-9952-441143FFA226}" type="datetimeFigureOut">
               <a:rPr lang="en-US" smtClean="0"/>
-              <a:t>8/10/2026</a:t>
+              <a:t>8/11/2026</a:t>
             </a:fld>
             <a:endParaRPr lang="en-US"/>
           </a:p>
@@ -2533,7 +2550,7 @@
           <a:p>
             <a:fld id="{4284316B-64AA-40B5-9952-441143FFA226}" type="datetimeFigureOut">
               <a:rPr lang="en-US" smtClean="0"/>
-              <a:t>8/10/2026</a:t>
+              <a:t>8/11/2026</a:t>
             </a:fld>
             <a:endParaRPr lang="en-US"/>
           </a:p>
@@ -2844,7 +2861,7 @@
           <a:p>
             <a:fld id="{4284316B-64AA-40B5-9952-441143FFA226}" type="datetimeFigureOut">
               <a:rPr lang="en-US" smtClean="0"/>
-              <a:t>8/10/2026</a:t>
+              <a:t>8/11/2026</a:t>
             </a:fld>
             <a:endParaRPr lang="en-US"/>
           </a:p>
@@ -3132,7 +3149,7 @@
           <a:p>
             <a:fld id="{4284316B-64AA-40B5-9952-441143FFA226}" type="datetimeFigureOut">
               <a:rPr lang="en-US" smtClean="0"/>
-              <a:t>8/10/2026</a:t>
+              <a:t>8/11/2026</a:t>
             </a:fld>
             <a:endParaRPr lang="en-US"/>
           </a:p>
@@ -3373,7 +3390,7 @@
           <a:p>
             <a:fld id="{4284316B-64AA-40B5-9952-441143FFA226}" type="datetimeFigureOut">
               <a:rPr lang="en-US" smtClean="0"/>
-              <a:t>8/10/2026</a:t>
+              <a:t>8/11/2026</a:t>
             </a:fld>
             <a:endParaRPr lang="en-US"/>
           </a:p>
@@ -4844,6 +4861,446 @@
 </p:sld>
 </file>
 
+<file path=ppt/slides/slide16.xml><?xml version="1.0" encoding="utf-8"?>
+<p:sld xmlns:a="http://schemas.openxmlformats.org/drawingml/2006/main" xmlns:r="http://schemas.openxmlformats.org/officeDocument/2006/relationships" xmlns:p="http://schemas.openxmlformats.org/presentationml/2006/main">
+  <p:cSld>
+    <p:spTree>
+      <p:nvGrpSpPr>
+        <p:cNvPr id="1" name=""/>
+        <p:cNvGrpSpPr/>
+        <p:nvPr/>
+      </p:nvGrpSpPr>
+      <p:grpSpPr>
+        <a:xfrm>
+          <a:off x="0" y="0"/>
+          <a:ext cx="0" cy="0"/>
+          <a:chOff x="0" y="0"/>
+          <a:chExt cx="0" cy="0"/>
+        </a:xfrm>
+      </p:grpSpPr>
+      <p:sp>
+        <p:nvSpPr>
+          <p:cNvPr id="2" name="Title 1">
+            <a:extLst>
+              <a:ext uri="{FF2B5EF4-FFF2-40B4-BE49-F238E27FC236}">
+                <a16:creationId xmlns:a16="http://schemas.microsoft.com/office/drawing/2014/main" id="{B171C31A-CF01-80A5-98B1-447B76BB4F93}"/>
+              </a:ext>
+            </a:extLst>
+          </p:cNvPr>
+          <p:cNvSpPr>
+            <a:spLocks noGrp="1"/>
+          </p:cNvSpPr>
+          <p:nvPr>
+            <p:ph type="title"/>
+          </p:nvPr>
+        </p:nvSpPr>
+        <p:spPr/>
+        <p:txBody>
+          <a:bodyPr/>
+          <a:lstStyle/>
+          <a:p>
+            <a:endParaRPr lang="en-CA"/>
+          </a:p>
+        </p:txBody>
+      </p:sp>
+      <p:sp>
+        <p:nvSpPr>
+          <p:cNvPr id="3" name="Content Placeholder 2">
+            <a:extLst>
+              <a:ext uri="{FF2B5EF4-FFF2-40B4-BE49-F238E27FC236}">
+                <a16:creationId xmlns:a16="http://schemas.microsoft.com/office/drawing/2014/main" id="{2D07B4CB-9C3F-477E-53C0-1889AFF0A0EF}"/>
+              </a:ext>
+            </a:extLst>
+          </p:cNvPr>
+          <p:cNvSpPr>
+            <a:spLocks noGrp="1"/>
+          </p:cNvSpPr>
+          <p:nvPr>
+            <p:ph idx="1"/>
+          </p:nvPr>
+        </p:nvSpPr>
+        <p:spPr/>
+        <p:txBody>
+          <a:bodyPr/>
+          <a:lstStyle/>
+          <a:p>
+            <a:endParaRPr lang="en-CA"/>
+          </a:p>
+        </p:txBody>
+      </p:sp>
+      <p:pic>
+        <p:nvPicPr>
+          <p:cNvPr id="7" name="Picture 6">
+            <a:extLst>
+              <a:ext uri="{FF2B5EF4-FFF2-40B4-BE49-F238E27FC236}">
+                <a16:creationId xmlns:a16="http://schemas.microsoft.com/office/drawing/2014/main" id="{E6F93936-C267-633E-764B-8A51D694734A}"/>
+              </a:ext>
+            </a:extLst>
+          </p:cNvPr>
+          <p:cNvPicPr>
+            <a:picLocks noChangeAspect="1"/>
+          </p:cNvPicPr>
+          <p:nvPr/>
+        </p:nvPicPr>
+        <p:blipFill>
+          <a:blip r:embed="rId2"/>
+          <a:stretch>
+            <a:fillRect/>
+          </a:stretch>
+        </p:blipFill>
+        <p:spPr>
+          <a:xfrm>
+            <a:off x="1906599" y="1312799"/>
+            <a:ext cx="7906853" cy="3839111"/>
+          </a:xfrm>
+          <a:prstGeom prst="rect">
+            <a:avLst/>
+          </a:prstGeom>
+        </p:spPr>
+      </p:pic>
+    </p:spTree>
+    <p:extLst>
+      <p:ext uri="{BB962C8B-B14F-4D97-AF65-F5344CB8AC3E}">
+        <p14:creationId xmlns:p14="http://schemas.microsoft.com/office/powerpoint/2010/main" val="578708501"/>
+      </p:ext>
+    </p:extLst>
+  </p:cSld>
+  <p:clrMapOvr>
+    <a:masterClrMapping/>
+  </p:clrMapOvr>
+</p:sld>
+</file>
+
+<file path=ppt/slides/slide17.xml><?xml version="1.0" encoding="utf-8"?>
+<p:sld xmlns:a="http://schemas.openxmlformats.org/drawingml/2006/main" xmlns:r="http://schemas.openxmlformats.org/officeDocument/2006/relationships" xmlns:p="http://schemas.openxmlformats.org/presentationml/2006/main">
+  <p:cSld>
+    <p:spTree>
+      <p:nvGrpSpPr>
+        <p:cNvPr id="1" name=""/>
+        <p:cNvGrpSpPr/>
+        <p:nvPr/>
+      </p:nvGrpSpPr>
+      <p:grpSpPr>
+        <a:xfrm>
+          <a:off x="0" y="0"/>
+          <a:ext cx="0" cy="0"/>
+          <a:chOff x="0" y="0"/>
+          <a:chExt cx="0" cy="0"/>
+        </a:xfrm>
+      </p:grpSpPr>
+      <p:sp>
+        <p:nvSpPr>
+          <p:cNvPr id="2" name="Title 1">
+            <a:extLst>
+              <a:ext uri="{FF2B5EF4-FFF2-40B4-BE49-F238E27FC236}">
+                <a16:creationId xmlns:a16="http://schemas.microsoft.com/office/drawing/2014/main" id="{60C000B0-AAAB-3A54-BB7B-9EC84F21794B}"/>
+              </a:ext>
+            </a:extLst>
+          </p:cNvPr>
+          <p:cNvSpPr>
+            <a:spLocks noGrp="1"/>
+          </p:cNvSpPr>
+          <p:nvPr>
+            <p:ph type="title"/>
+          </p:nvPr>
+        </p:nvSpPr>
+        <p:spPr/>
+        <p:txBody>
+          <a:bodyPr/>
+          <a:lstStyle/>
+          <a:p>
+            <a:endParaRPr lang="en-CA"/>
+          </a:p>
+        </p:txBody>
+      </p:sp>
+      <p:sp>
+        <p:nvSpPr>
+          <p:cNvPr id="3" name="Content Placeholder 2">
+            <a:extLst>
+              <a:ext uri="{FF2B5EF4-FFF2-40B4-BE49-F238E27FC236}">
+                <a16:creationId xmlns:a16="http://schemas.microsoft.com/office/drawing/2014/main" id="{5B6A1752-F74B-B408-C3AD-F65B7AA518CF}"/>
+              </a:ext>
+            </a:extLst>
+          </p:cNvPr>
+          <p:cNvSpPr>
+            <a:spLocks noGrp="1"/>
+          </p:cNvSpPr>
+          <p:nvPr>
+            <p:ph idx="1"/>
+          </p:nvPr>
+        </p:nvSpPr>
+        <p:spPr/>
+        <p:txBody>
+          <a:bodyPr/>
+          <a:lstStyle/>
+          <a:p>
+            <a:endParaRPr lang="en-CA"/>
+          </a:p>
+        </p:txBody>
+      </p:sp>
+      <p:pic>
+        <p:nvPicPr>
+          <p:cNvPr id="5" name="Picture 4">
+            <a:extLst>
+              <a:ext uri="{FF2B5EF4-FFF2-40B4-BE49-F238E27FC236}">
+                <a16:creationId xmlns:a16="http://schemas.microsoft.com/office/drawing/2014/main" id="{52D6B9C6-2868-8C1F-F72C-A8130A0EFBE8}"/>
+              </a:ext>
+            </a:extLst>
+          </p:cNvPr>
+          <p:cNvPicPr>
+            <a:picLocks noChangeAspect="1"/>
+          </p:cNvPicPr>
+          <p:nvPr/>
+        </p:nvPicPr>
+        <p:blipFill>
+          <a:blip r:embed="rId2"/>
+          <a:stretch>
+            <a:fillRect/>
+          </a:stretch>
+        </p:blipFill>
+        <p:spPr>
+          <a:xfrm>
+            <a:off x="1594809" y="904522"/>
+            <a:ext cx="9002381" cy="5048955"/>
+          </a:xfrm>
+          <a:prstGeom prst="rect">
+            <a:avLst/>
+          </a:prstGeom>
+        </p:spPr>
+      </p:pic>
+    </p:spTree>
+    <p:extLst>
+      <p:ext uri="{BB962C8B-B14F-4D97-AF65-F5344CB8AC3E}">
+        <p14:creationId xmlns:p14="http://schemas.microsoft.com/office/powerpoint/2010/main" val="3729261180"/>
+      </p:ext>
+    </p:extLst>
+  </p:cSld>
+  <p:clrMapOvr>
+    <a:masterClrMapping/>
+  </p:clrMapOvr>
+</p:sld>
+</file>
+
+<file path=ppt/slides/slide18.xml><?xml version="1.0" encoding="utf-8"?>
+<p:sld xmlns:a="http://schemas.openxmlformats.org/drawingml/2006/main" xmlns:r="http://schemas.openxmlformats.org/officeDocument/2006/relationships" xmlns:p="http://schemas.openxmlformats.org/presentationml/2006/main">
+  <p:cSld>
+    <p:spTree>
+      <p:nvGrpSpPr>
+        <p:cNvPr id="1" name=""/>
+        <p:cNvGrpSpPr/>
+        <p:nvPr/>
+      </p:nvGrpSpPr>
+      <p:grpSpPr>
+        <a:xfrm>
+          <a:off x="0" y="0"/>
+          <a:ext cx="0" cy="0"/>
+          <a:chOff x="0" y="0"/>
+          <a:chExt cx="0" cy="0"/>
+        </a:xfrm>
+      </p:grpSpPr>
+      <p:sp>
+        <p:nvSpPr>
+          <p:cNvPr id="2" name="Title 1">
+            <a:extLst>
+              <a:ext uri="{FF2B5EF4-FFF2-40B4-BE49-F238E27FC236}">
+                <a16:creationId xmlns:a16="http://schemas.microsoft.com/office/drawing/2014/main" id="{9BB9745F-5187-F735-9E1E-378D121A77DE}"/>
+              </a:ext>
+            </a:extLst>
+          </p:cNvPr>
+          <p:cNvSpPr>
+            <a:spLocks noGrp="1"/>
+          </p:cNvSpPr>
+          <p:nvPr>
+            <p:ph type="title"/>
+          </p:nvPr>
+        </p:nvSpPr>
+        <p:spPr/>
+        <p:txBody>
+          <a:bodyPr/>
+          <a:lstStyle/>
+          <a:p>
+            <a:endParaRPr lang="en-CA"/>
+          </a:p>
+        </p:txBody>
+      </p:sp>
+      <p:sp>
+        <p:nvSpPr>
+          <p:cNvPr id="3" name="Content Placeholder 2">
+            <a:extLst>
+              <a:ext uri="{FF2B5EF4-FFF2-40B4-BE49-F238E27FC236}">
+                <a16:creationId xmlns:a16="http://schemas.microsoft.com/office/drawing/2014/main" id="{4B80DC3A-94C4-6BBD-4C3F-EB55BF260849}"/>
+              </a:ext>
+            </a:extLst>
+          </p:cNvPr>
+          <p:cNvSpPr>
+            <a:spLocks noGrp="1"/>
+          </p:cNvSpPr>
+          <p:nvPr>
+            <p:ph idx="1"/>
+          </p:nvPr>
+        </p:nvSpPr>
+        <p:spPr/>
+        <p:txBody>
+          <a:bodyPr/>
+          <a:lstStyle/>
+          <a:p>
+            <a:endParaRPr lang="en-CA"/>
+          </a:p>
+        </p:txBody>
+      </p:sp>
+      <p:pic>
+        <p:nvPicPr>
+          <p:cNvPr id="7" name="Picture 6">
+            <a:extLst>
+              <a:ext uri="{FF2B5EF4-FFF2-40B4-BE49-F238E27FC236}">
+                <a16:creationId xmlns:a16="http://schemas.microsoft.com/office/drawing/2014/main" id="{4CBFFA94-28A1-C1D6-B6B8-64565F47D2C5}"/>
+              </a:ext>
+            </a:extLst>
+          </p:cNvPr>
+          <p:cNvPicPr>
+            <a:picLocks noChangeAspect="1"/>
+          </p:cNvPicPr>
+          <p:nvPr/>
+        </p:nvPicPr>
+        <p:blipFill>
+          <a:blip r:embed="rId2"/>
+          <a:stretch>
+            <a:fillRect/>
+          </a:stretch>
+        </p:blipFill>
+        <p:spPr>
+          <a:xfrm>
+            <a:off x="2433126" y="1185549"/>
+            <a:ext cx="7325747" cy="4486901"/>
+          </a:xfrm>
+          <a:prstGeom prst="rect">
+            <a:avLst/>
+          </a:prstGeom>
+        </p:spPr>
+      </p:pic>
+    </p:spTree>
+    <p:extLst>
+      <p:ext uri="{BB962C8B-B14F-4D97-AF65-F5344CB8AC3E}">
+        <p14:creationId xmlns:p14="http://schemas.microsoft.com/office/powerpoint/2010/main" val="2000715134"/>
+      </p:ext>
+    </p:extLst>
+  </p:cSld>
+  <p:clrMapOvr>
+    <a:masterClrMapping/>
+  </p:clrMapOvr>
+</p:sld>
+</file>
+
+<file path=ppt/slides/slide19.xml><?xml version="1.0" encoding="utf-8"?>
+<p:sld xmlns:a="http://schemas.openxmlformats.org/drawingml/2006/main" xmlns:r="http://schemas.openxmlformats.org/officeDocument/2006/relationships" xmlns:p="http://schemas.openxmlformats.org/presentationml/2006/main">
+  <p:cSld>
+    <p:spTree>
+      <p:nvGrpSpPr>
+        <p:cNvPr id="1" name=""/>
+        <p:cNvGrpSpPr/>
+        <p:nvPr/>
+      </p:nvGrpSpPr>
+      <p:grpSpPr>
+        <a:xfrm>
+          <a:off x="0" y="0"/>
+          <a:ext cx="0" cy="0"/>
+          <a:chOff x="0" y="0"/>
+          <a:chExt cx="0" cy="0"/>
+        </a:xfrm>
+      </p:grpSpPr>
+      <p:sp>
+        <p:nvSpPr>
+          <p:cNvPr id="2" name="Title 1">
+            <a:extLst>
+              <a:ext uri="{FF2B5EF4-FFF2-40B4-BE49-F238E27FC236}">
+                <a16:creationId xmlns:a16="http://schemas.microsoft.com/office/drawing/2014/main" id="{F3CCF800-705A-3596-4C9B-DCDFA909C9B5}"/>
+              </a:ext>
+            </a:extLst>
+          </p:cNvPr>
+          <p:cNvSpPr>
+            <a:spLocks noGrp="1"/>
+          </p:cNvSpPr>
+          <p:nvPr>
+            <p:ph type="title"/>
+          </p:nvPr>
+        </p:nvSpPr>
+        <p:spPr/>
+        <p:txBody>
+          <a:bodyPr/>
+          <a:lstStyle/>
+          <a:p>
+            <a:endParaRPr lang="en-CA"/>
+          </a:p>
+        </p:txBody>
+      </p:sp>
+      <p:sp>
+        <p:nvSpPr>
+          <p:cNvPr id="3" name="Content Placeholder 2">
+            <a:extLst>
+              <a:ext uri="{FF2B5EF4-FFF2-40B4-BE49-F238E27FC236}">
+                <a16:creationId xmlns:a16="http://schemas.microsoft.com/office/drawing/2014/main" id="{AD0517A3-13F5-7C42-9A27-8302F312D117}"/>
+              </a:ext>
+            </a:extLst>
+          </p:cNvPr>
+          <p:cNvSpPr>
+            <a:spLocks noGrp="1"/>
+          </p:cNvSpPr>
+          <p:nvPr>
+            <p:ph idx="1"/>
+          </p:nvPr>
+        </p:nvSpPr>
+        <p:spPr/>
+        <p:txBody>
+          <a:bodyPr/>
+          <a:lstStyle/>
+          <a:p>
+            <a:endParaRPr lang="en-CA"/>
+          </a:p>
+        </p:txBody>
+      </p:sp>
+      <p:pic>
+        <p:nvPicPr>
+          <p:cNvPr id="5" name="Picture 4">
+            <a:extLst>
+              <a:ext uri="{FF2B5EF4-FFF2-40B4-BE49-F238E27FC236}">
+                <a16:creationId xmlns:a16="http://schemas.microsoft.com/office/drawing/2014/main" id="{9927E30A-6242-7175-430B-9F2CB513C53D}"/>
+              </a:ext>
+            </a:extLst>
+          </p:cNvPr>
+          <p:cNvPicPr>
+            <a:picLocks noChangeAspect="1"/>
+          </p:cNvPicPr>
+          <p:nvPr/>
+        </p:nvPicPr>
+        <p:blipFill>
+          <a:blip r:embed="rId2"/>
+          <a:stretch>
+            <a:fillRect/>
+          </a:stretch>
+        </p:blipFill>
+        <p:spPr>
+          <a:xfrm>
+            <a:off x="1980625" y="728285"/>
+            <a:ext cx="8230749" cy="5401429"/>
+          </a:xfrm>
+          <a:prstGeom prst="rect">
+            <a:avLst/>
+          </a:prstGeom>
+        </p:spPr>
+      </p:pic>
+    </p:spTree>
+    <p:extLst>
+      <p:ext uri="{BB962C8B-B14F-4D97-AF65-F5344CB8AC3E}">
+        <p14:creationId xmlns:p14="http://schemas.microsoft.com/office/powerpoint/2010/main" val="2855405782"/>
+      </p:ext>
+    </p:extLst>
+  </p:cSld>
+  <p:clrMapOvr>
+    <a:masterClrMapping/>
+  </p:clrMapOvr>
+</p:sld>
+</file>
+
 <file path=ppt/slides/slide2.xml><?xml version="1.0" encoding="utf-8"?>
 <p:sld xmlns:a="http://schemas.openxmlformats.org/drawingml/2006/main" xmlns:r="http://schemas.openxmlformats.org/officeDocument/2006/relationships" xmlns:p="http://schemas.openxmlformats.org/presentationml/2006/main">
   <p:cSld>
@@ -4914,6 +5371,1286 @@
 </p:sld>
 </file>
 
+<file path=ppt/slides/slide20.xml><?xml version="1.0" encoding="utf-8"?>
+<p:sld xmlns:a="http://schemas.openxmlformats.org/drawingml/2006/main" xmlns:r="http://schemas.openxmlformats.org/officeDocument/2006/relationships" xmlns:p="http://schemas.openxmlformats.org/presentationml/2006/main">
+  <p:cSld>
+    <p:spTree>
+      <p:nvGrpSpPr>
+        <p:cNvPr id="1" name=""/>
+        <p:cNvGrpSpPr/>
+        <p:nvPr/>
+      </p:nvGrpSpPr>
+      <p:grpSpPr>
+        <a:xfrm>
+          <a:off x="0" y="0"/>
+          <a:ext cx="0" cy="0"/>
+          <a:chOff x="0" y="0"/>
+          <a:chExt cx="0" cy="0"/>
+        </a:xfrm>
+      </p:grpSpPr>
+      <p:sp>
+        <p:nvSpPr>
+          <p:cNvPr id="2" name="Title 1">
+            <a:extLst>
+              <a:ext uri="{FF2B5EF4-FFF2-40B4-BE49-F238E27FC236}">
+                <a16:creationId xmlns:a16="http://schemas.microsoft.com/office/drawing/2014/main" id="{27A42DA2-5417-D1D8-909E-6538B6552898}"/>
+              </a:ext>
+            </a:extLst>
+          </p:cNvPr>
+          <p:cNvSpPr>
+            <a:spLocks noGrp="1"/>
+          </p:cNvSpPr>
+          <p:nvPr>
+            <p:ph type="title"/>
+          </p:nvPr>
+        </p:nvSpPr>
+        <p:spPr/>
+        <p:txBody>
+          <a:bodyPr/>
+          <a:lstStyle/>
+          <a:p>
+            <a:endParaRPr lang="en-CA"/>
+          </a:p>
+        </p:txBody>
+      </p:sp>
+      <p:sp>
+        <p:nvSpPr>
+          <p:cNvPr id="3" name="Content Placeholder 2">
+            <a:extLst>
+              <a:ext uri="{FF2B5EF4-FFF2-40B4-BE49-F238E27FC236}">
+                <a16:creationId xmlns:a16="http://schemas.microsoft.com/office/drawing/2014/main" id="{2310EFF7-B141-E6EC-8201-7127E1AF0B75}"/>
+              </a:ext>
+            </a:extLst>
+          </p:cNvPr>
+          <p:cNvSpPr>
+            <a:spLocks noGrp="1"/>
+          </p:cNvSpPr>
+          <p:nvPr>
+            <p:ph idx="1"/>
+          </p:nvPr>
+        </p:nvSpPr>
+        <p:spPr/>
+        <p:txBody>
+          <a:bodyPr/>
+          <a:lstStyle/>
+          <a:p>
+            <a:endParaRPr lang="en-CA"/>
+          </a:p>
+        </p:txBody>
+      </p:sp>
+      <p:pic>
+        <p:nvPicPr>
+          <p:cNvPr id="5" name="Picture 4">
+            <a:extLst>
+              <a:ext uri="{FF2B5EF4-FFF2-40B4-BE49-F238E27FC236}">
+                <a16:creationId xmlns:a16="http://schemas.microsoft.com/office/drawing/2014/main" id="{E9112078-57B8-A9B4-8A90-2770200C1E76}"/>
+              </a:ext>
+            </a:extLst>
+          </p:cNvPr>
+          <p:cNvPicPr>
+            <a:picLocks noChangeAspect="1"/>
+          </p:cNvPicPr>
+          <p:nvPr/>
+        </p:nvPicPr>
+        <p:blipFill>
+          <a:blip r:embed="rId2"/>
+          <a:stretch>
+            <a:fillRect/>
+          </a:stretch>
+        </p:blipFill>
+        <p:spPr>
+          <a:xfrm>
+            <a:off x="580255" y="681037"/>
+            <a:ext cx="11031489" cy="5058481"/>
+          </a:xfrm>
+          <a:prstGeom prst="rect">
+            <a:avLst/>
+          </a:prstGeom>
+        </p:spPr>
+      </p:pic>
+    </p:spTree>
+    <p:extLst>
+      <p:ext uri="{BB962C8B-B14F-4D97-AF65-F5344CB8AC3E}">
+        <p14:creationId xmlns:p14="http://schemas.microsoft.com/office/powerpoint/2010/main" val="1239954329"/>
+      </p:ext>
+    </p:extLst>
+  </p:cSld>
+  <p:clrMapOvr>
+    <a:masterClrMapping/>
+  </p:clrMapOvr>
+</p:sld>
+</file>
+
+<file path=ppt/slides/slide21.xml><?xml version="1.0" encoding="utf-8"?>
+<p:sld xmlns:a="http://schemas.openxmlformats.org/drawingml/2006/main" xmlns:r="http://schemas.openxmlformats.org/officeDocument/2006/relationships" xmlns:p="http://schemas.openxmlformats.org/presentationml/2006/main">
+  <p:cSld>
+    <p:spTree>
+      <p:nvGrpSpPr>
+        <p:cNvPr id="1" name=""/>
+        <p:cNvGrpSpPr/>
+        <p:nvPr/>
+      </p:nvGrpSpPr>
+      <p:grpSpPr>
+        <a:xfrm>
+          <a:off x="0" y="0"/>
+          <a:ext cx="0" cy="0"/>
+          <a:chOff x="0" y="0"/>
+          <a:chExt cx="0" cy="0"/>
+        </a:xfrm>
+      </p:grpSpPr>
+      <p:sp>
+        <p:nvSpPr>
+          <p:cNvPr id="2" name="Title 1">
+            <a:extLst>
+              <a:ext uri="{FF2B5EF4-FFF2-40B4-BE49-F238E27FC236}">
+                <a16:creationId xmlns:a16="http://schemas.microsoft.com/office/drawing/2014/main" id="{FB00738D-DEE4-923D-C8E8-6E472E664B25}"/>
+              </a:ext>
+            </a:extLst>
+          </p:cNvPr>
+          <p:cNvSpPr>
+            <a:spLocks noGrp="1"/>
+          </p:cNvSpPr>
+          <p:nvPr>
+            <p:ph type="title"/>
+          </p:nvPr>
+        </p:nvSpPr>
+        <p:spPr/>
+        <p:txBody>
+          <a:bodyPr/>
+          <a:lstStyle/>
+          <a:p>
+            <a:endParaRPr lang="en-CA"/>
+          </a:p>
+        </p:txBody>
+      </p:sp>
+      <p:sp>
+        <p:nvSpPr>
+          <p:cNvPr id="3" name="Content Placeholder 2">
+            <a:extLst>
+              <a:ext uri="{FF2B5EF4-FFF2-40B4-BE49-F238E27FC236}">
+                <a16:creationId xmlns:a16="http://schemas.microsoft.com/office/drawing/2014/main" id="{96A7115D-FFA1-745F-AB1B-9E00C41A5C90}"/>
+              </a:ext>
+            </a:extLst>
+          </p:cNvPr>
+          <p:cNvSpPr>
+            <a:spLocks noGrp="1"/>
+          </p:cNvSpPr>
+          <p:nvPr>
+            <p:ph idx="1"/>
+          </p:nvPr>
+        </p:nvSpPr>
+        <p:spPr/>
+        <p:txBody>
+          <a:bodyPr/>
+          <a:lstStyle/>
+          <a:p>
+            <a:endParaRPr lang="en-CA"/>
+          </a:p>
+        </p:txBody>
+      </p:sp>
+      <p:pic>
+        <p:nvPicPr>
+          <p:cNvPr id="5" name="Picture 4">
+            <a:extLst>
+              <a:ext uri="{FF2B5EF4-FFF2-40B4-BE49-F238E27FC236}">
+                <a16:creationId xmlns:a16="http://schemas.microsoft.com/office/drawing/2014/main" id="{617E41D6-95EC-3F84-A2B4-B14213FFBC7E}"/>
+              </a:ext>
+            </a:extLst>
+          </p:cNvPr>
+          <p:cNvPicPr>
+            <a:picLocks noChangeAspect="1"/>
+          </p:cNvPicPr>
+          <p:nvPr/>
+        </p:nvPicPr>
+        <p:blipFill>
+          <a:blip r:embed="rId2"/>
+          <a:stretch>
+            <a:fillRect/>
+          </a:stretch>
+        </p:blipFill>
+        <p:spPr>
+          <a:xfrm>
+            <a:off x="0" y="778426"/>
+            <a:ext cx="12192000" cy="5301148"/>
+          </a:xfrm>
+          <a:prstGeom prst="rect">
+            <a:avLst/>
+          </a:prstGeom>
+        </p:spPr>
+      </p:pic>
+    </p:spTree>
+    <p:extLst>
+      <p:ext uri="{BB962C8B-B14F-4D97-AF65-F5344CB8AC3E}">
+        <p14:creationId xmlns:p14="http://schemas.microsoft.com/office/powerpoint/2010/main" val="1110211820"/>
+      </p:ext>
+    </p:extLst>
+  </p:cSld>
+  <p:clrMapOvr>
+    <a:masterClrMapping/>
+  </p:clrMapOvr>
+</p:sld>
+</file>
+
+<file path=ppt/slides/slide22.xml><?xml version="1.0" encoding="utf-8"?>
+<p:sld xmlns:a="http://schemas.openxmlformats.org/drawingml/2006/main" xmlns:r="http://schemas.openxmlformats.org/officeDocument/2006/relationships" xmlns:p="http://schemas.openxmlformats.org/presentationml/2006/main">
+  <p:cSld>
+    <p:spTree>
+      <p:nvGrpSpPr>
+        <p:cNvPr id="1" name=""/>
+        <p:cNvGrpSpPr/>
+        <p:nvPr/>
+      </p:nvGrpSpPr>
+      <p:grpSpPr>
+        <a:xfrm>
+          <a:off x="0" y="0"/>
+          <a:ext cx="0" cy="0"/>
+          <a:chOff x="0" y="0"/>
+          <a:chExt cx="0" cy="0"/>
+        </a:xfrm>
+      </p:grpSpPr>
+      <p:sp>
+        <p:nvSpPr>
+          <p:cNvPr id="2" name="Title 1">
+            <a:extLst>
+              <a:ext uri="{FF2B5EF4-FFF2-40B4-BE49-F238E27FC236}">
+                <a16:creationId xmlns:a16="http://schemas.microsoft.com/office/drawing/2014/main" id="{A7ACC334-7931-8534-978B-CE10331A7F7D}"/>
+              </a:ext>
+            </a:extLst>
+          </p:cNvPr>
+          <p:cNvSpPr>
+            <a:spLocks noGrp="1"/>
+          </p:cNvSpPr>
+          <p:nvPr>
+            <p:ph type="title"/>
+          </p:nvPr>
+        </p:nvSpPr>
+        <p:spPr/>
+        <p:txBody>
+          <a:bodyPr/>
+          <a:lstStyle/>
+          <a:p>
+            <a:r>
+              <a:rPr lang="en-CA" dirty="0"/>
+              <a:t>In Greater Detail</a:t>
+            </a:r>
+          </a:p>
+        </p:txBody>
+      </p:sp>
+      <p:sp>
+        <p:nvSpPr>
+          <p:cNvPr id="3" name="Content Placeholder 2">
+            <a:extLst>
+              <a:ext uri="{FF2B5EF4-FFF2-40B4-BE49-F238E27FC236}">
+                <a16:creationId xmlns:a16="http://schemas.microsoft.com/office/drawing/2014/main" id="{DB322ED3-89B7-64EA-18CA-CC8F6A59EB3D}"/>
+              </a:ext>
+            </a:extLst>
+          </p:cNvPr>
+          <p:cNvSpPr>
+            <a:spLocks noGrp="1"/>
+          </p:cNvSpPr>
+          <p:nvPr>
+            <p:ph idx="1"/>
+          </p:nvPr>
+        </p:nvSpPr>
+        <p:spPr/>
+        <p:txBody>
+          <a:bodyPr/>
+          <a:lstStyle/>
+          <a:p>
+            <a:r>
+              <a:rPr lang="en-CA" dirty="0"/>
+              <a:t>ATC (Aspect-Term Categorization)</a:t>
+            </a:r>
+          </a:p>
+          <a:p>
+            <a:r>
+              <a:rPr lang="en-CA" dirty="0"/>
+              <a:t>Sentiment Extraction</a:t>
+            </a:r>
+          </a:p>
+          <a:p>
+            <a:r>
+              <a:rPr lang="en-CA" dirty="0" err="1"/>
+              <a:t>CatBoost</a:t>
+            </a:r>
+            <a:r>
+              <a:rPr lang="en-CA" dirty="0"/>
+              <a:t> Modeling</a:t>
+            </a:r>
+          </a:p>
+          <a:p>
+            <a:r>
+              <a:rPr lang="en-CA" dirty="0"/>
+              <a:t>Validity-weighted Attenuation and Rating Adjustment</a:t>
+            </a:r>
+          </a:p>
+          <a:p>
+            <a:endParaRPr lang="en-CA" dirty="0"/>
+          </a:p>
+        </p:txBody>
+      </p:sp>
+    </p:spTree>
+    <p:extLst>
+      <p:ext uri="{BB962C8B-B14F-4D97-AF65-F5344CB8AC3E}">
+        <p14:creationId xmlns:p14="http://schemas.microsoft.com/office/powerpoint/2010/main" val="1830798512"/>
+      </p:ext>
+    </p:extLst>
+  </p:cSld>
+  <p:clrMapOvr>
+    <a:masterClrMapping/>
+  </p:clrMapOvr>
+</p:sld>
+</file>
+
+<file path=ppt/slides/slide23.xml><?xml version="1.0" encoding="utf-8"?>
+<p:sld xmlns:a="http://schemas.openxmlformats.org/drawingml/2006/main" xmlns:r="http://schemas.openxmlformats.org/officeDocument/2006/relationships" xmlns:p="http://schemas.openxmlformats.org/presentationml/2006/main">
+  <p:cSld>
+    <p:spTree>
+      <p:nvGrpSpPr>
+        <p:cNvPr id="1" name=""/>
+        <p:cNvGrpSpPr/>
+        <p:nvPr/>
+      </p:nvGrpSpPr>
+      <p:grpSpPr>
+        <a:xfrm>
+          <a:off x="0" y="0"/>
+          <a:ext cx="0" cy="0"/>
+          <a:chOff x="0" y="0"/>
+          <a:chExt cx="0" cy="0"/>
+        </a:xfrm>
+      </p:grpSpPr>
+      <p:sp>
+        <p:nvSpPr>
+          <p:cNvPr id="2" name="Title 1">
+            <a:extLst>
+              <a:ext uri="{FF2B5EF4-FFF2-40B4-BE49-F238E27FC236}">
+                <a16:creationId xmlns:a16="http://schemas.microsoft.com/office/drawing/2014/main" id="{A8C70A37-02BB-45D6-7471-3EFDB117C006}"/>
+              </a:ext>
+            </a:extLst>
+          </p:cNvPr>
+          <p:cNvSpPr>
+            <a:spLocks noGrp="1"/>
+          </p:cNvSpPr>
+          <p:nvPr>
+            <p:ph type="title"/>
+          </p:nvPr>
+        </p:nvSpPr>
+        <p:spPr/>
+        <p:txBody>
+          <a:bodyPr/>
+          <a:lstStyle/>
+          <a:p>
+            <a:r>
+              <a:rPr lang="en-CA" dirty="0"/>
+              <a:t>ATC</a:t>
+            </a:r>
+          </a:p>
+        </p:txBody>
+      </p:sp>
+      <p:sp>
+        <p:nvSpPr>
+          <p:cNvPr id="3" name="Content Placeholder 2">
+            <a:extLst>
+              <a:ext uri="{FF2B5EF4-FFF2-40B4-BE49-F238E27FC236}">
+                <a16:creationId xmlns:a16="http://schemas.microsoft.com/office/drawing/2014/main" id="{2AE684D3-A236-D231-CC9B-61736453DA6C}"/>
+              </a:ext>
+            </a:extLst>
+          </p:cNvPr>
+          <p:cNvSpPr>
+            <a:spLocks noGrp="1"/>
+          </p:cNvSpPr>
+          <p:nvPr>
+            <p:ph idx="1"/>
+          </p:nvPr>
+        </p:nvSpPr>
+        <p:spPr/>
+        <p:txBody>
+          <a:bodyPr/>
+          <a:lstStyle/>
+          <a:p>
+            <a:r>
+              <a:rPr lang="en-CA" dirty="0"/>
+              <a:t>Review Clauses are embedded using </a:t>
+            </a:r>
+            <a:r>
+              <a:rPr lang="en-CA" u="sng" dirty="0">
+                <a:hlinkClick r:id="rId2"/>
+              </a:rPr>
+              <a:t>all-mpnet-base-v2</a:t>
+            </a:r>
+          </a:p>
+          <a:p>
+            <a:r>
+              <a:rPr lang="en-CA" dirty="0"/>
+              <a:t>Category Descriptions are embedded</a:t>
+            </a:r>
+          </a:p>
+          <a:p>
+            <a:r>
+              <a:rPr lang="en-CA" dirty="0"/>
+              <a:t>Cosine Similarity compares the semantic “distance” between the categories and each review clause</a:t>
+            </a:r>
+          </a:p>
+          <a:p>
+            <a:r>
+              <a:rPr lang="en-US" dirty="0"/>
+              <a:t>Assign the highest-similarity category if its cosine similarity exceeds 0.25</a:t>
+            </a:r>
+          </a:p>
+          <a:p>
+            <a:r>
+              <a:rPr lang="en-US" dirty="0"/>
+              <a:t>O</a:t>
+            </a:r>
+            <a:r>
+              <a:rPr lang="en-US"/>
+              <a:t>therwise </a:t>
+            </a:r>
+            <a:r>
+              <a:rPr lang="en-US" dirty="0"/>
+              <a:t>assign </a:t>
+            </a:r>
+            <a:r>
+              <a:rPr lang="en-US" i="1" dirty="0"/>
+              <a:t>Miscellaneous</a:t>
+            </a:r>
+            <a:r>
+              <a:rPr lang="en-US" dirty="0"/>
+              <a:t>.</a:t>
+            </a:r>
+            <a:endParaRPr lang="en-CA" i="1" dirty="0"/>
+          </a:p>
+          <a:p>
+            <a:r>
+              <a:rPr lang="en-CA" i="1" dirty="0"/>
+              <a:t>Miscellaneous, Instructional Effectiveness, Workload, </a:t>
+            </a:r>
+            <a:r>
+              <a:rPr lang="en-CA" i="1" dirty="0" err="1"/>
+              <a:t>Fairnes</a:t>
+            </a:r>
+            <a:endParaRPr lang="en-CA" i="1" dirty="0"/>
+          </a:p>
+          <a:p>
+            <a:pPr marL="0" indent="0">
+              <a:buNone/>
+            </a:pPr>
+            <a:endParaRPr lang="en-CA" dirty="0"/>
+          </a:p>
+          <a:p>
+            <a:endParaRPr lang="en-CA" dirty="0"/>
+          </a:p>
+        </p:txBody>
+      </p:sp>
+    </p:spTree>
+    <p:extLst>
+      <p:ext uri="{BB962C8B-B14F-4D97-AF65-F5344CB8AC3E}">
+        <p14:creationId xmlns:p14="http://schemas.microsoft.com/office/powerpoint/2010/main" val="3635161383"/>
+      </p:ext>
+    </p:extLst>
+  </p:cSld>
+  <p:clrMapOvr>
+    <a:masterClrMapping/>
+  </p:clrMapOvr>
+</p:sld>
+</file>
+
+<file path=ppt/slides/slide24.xml><?xml version="1.0" encoding="utf-8"?>
+<p:sld xmlns:a="http://schemas.openxmlformats.org/drawingml/2006/main" xmlns:r="http://schemas.openxmlformats.org/officeDocument/2006/relationships" xmlns:p="http://schemas.openxmlformats.org/presentationml/2006/main">
+  <p:cSld>
+    <p:spTree>
+      <p:nvGrpSpPr>
+        <p:cNvPr id="1" name=""/>
+        <p:cNvGrpSpPr/>
+        <p:nvPr/>
+      </p:nvGrpSpPr>
+      <p:grpSpPr>
+        <a:xfrm>
+          <a:off x="0" y="0"/>
+          <a:ext cx="0" cy="0"/>
+          <a:chOff x="0" y="0"/>
+          <a:chExt cx="0" cy="0"/>
+        </a:xfrm>
+      </p:grpSpPr>
+      <p:sp>
+        <p:nvSpPr>
+          <p:cNvPr id="2" name="Title 1">
+            <a:extLst>
+              <a:ext uri="{FF2B5EF4-FFF2-40B4-BE49-F238E27FC236}">
+                <a16:creationId xmlns:a16="http://schemas.microsoft.com/office/drawing/2014/main" id="{DF4C048F-26F7-A301-CD03-53196E41EAED}"/>
+              </a:ext>
+            </a:extLst>
+          </p:cNvPr>
+          <p:cNvSpPr>
+            <a:spLocks noGrp="1"/>
+          </p:cNvSpPr>
+          <p:nvPr>
+            <p:ph type="title"/>
+          </p:nvPr>
+        </p:nvSpPr>
+        <p:spPr/>
+        <p:txBody>
+          <a:bodyPr/>
+          <a:lstStyle/>
+          <a:p>
+            <a:r>
+              <a:rPr lang="en-CA" i="1" dirty="0"/>
+              <a:t>Miscellaneous</a:t>
+            </a:r>
+            <a:r>
+              <a:rPr lang="en-CA" dirty="0"/>
+              <a:t> Density</a:t>
+            </a:r>
+          </a:p>
+        </p:txBody>
+      </p:sp>
+      <p:sp>
+        <p:nvSpPr>
+          <p:cNvPr id="3" name="Content Placeholder 2">
+            <a:extLst>
+              <a:ext uri="{FF2B5EF4-FFF2-40B4-BE49-F238E27FC236}">
+                <a16:creationId xmlns:a16="http://schemas.microsoft.com/office/drawing/2014/main" id="{54209241-7F95-C910-1FCA-D4DF4EBB65F4}"/>
+              </a:ext>
+            </a:extLst>
+          </p:cNvPr>
+          <p:cNvSpPr>
+            <a:spLocks noGrp="1"/>
+          </p:cNvSpPr>
+          <p:nvPr>
+            <p:ph idx="1"/>
+          </p:nvPr>
+        </p:nvSpPr>
+        <p:spPr/>
+        <p:txBody>
+          <a:bodyPr/>
+          <a:lstStyle/>
+          <a:p>
+            <a:r>
+              <a:rPr lang="en-CA" dirty="0"/>
+              <a:t>The proportion of </a:t>
+            </a:r>
+            <a:r>
+              <a:rPr lang="en-CA" i="1" dirty="0"/>
+              <a:t>the</a:t>
+            </a:r>
+            <a:r>
+              <a:rPr lang="en-CA" dirty="0"/>
+              <a:t> overall review directed towards the </a:t>
+            </a:r>
+            <a:r>
+              <a:rPr lang="en-CA" i="1" dirty="0" err="1"/>
+              <a:t>misc</a:t>
+            </a:r>
+            <a:r>
+              <a:rPr lang="en-CA" i="1" dirty="0"/>
+              <a:t> category.</a:t>
+            </a:r>
+          </a:p>
+          <a:p>
+            <a:r>
+              <a:rPr lang="en-CA" dirty="0"/>
+              <a:t>Represents how on-topic a review is.</a:t>
+            </a:r>
+          </a:p>
+          <a:p>
+            <a:r>
+              <a:rPr lang="en-CA" dirty="0" err="1"/>
+              <a:t>D_misc</a:t>
+            </a:r>
+            <a:r>
+              <a:rPr lang="en-CA" dirty="0"/>
+              <a:t> = 1.0 -&gt; fully off-topic</a:t>
+            </a:r>
+          </a:p>
+          <a:p>
+            <a:r>
+              <a:rPr lang="en-CA" dirty="0" err="1"/>
+              <a:t>D_misc</a:t>
+            </a:r>
+            <a:r>
+              <a:rPr lang="en-CA" dirty="0"/>
+              <a:t> = 0 -&gt; fully </a:t>
+            </a:r>
+            <a:r>
+              <a:rPr lang="en-CA" b="1" dirty="0"/>
+              <a:t>on</a:t>
+            </a:r>
+            <a:r>
+              <a:rPr lang="en-CA" dirty="0"/>
+              <a:t>-topic</a:t>
+            </a:r>
+          </a:p>
+        </p:txBody>
+      </p:sp>
+    </p:spTree>
+    <p:extLst>
+      <p:ext uri="{BB962C8B-B14F-4D97-AF65-F5344CB8AC3E}">
+        <p14:creationId xmlns:p14="http://schemas.microsoft.com/office/powerpoint/2010/main" val="4061446850"/>
+      </p:ext>
+    </p:extLst>
+  </p:cSld>
+  <p:clrMapOvr>
+    <a:masterClrMapping/>
+  </p:clrMapOvr>
+</p:sld>
+</file>
+
+<file path=ppt/slides/slide25.xml><?xml version="1.0" encoding="utf-8"?>
+<p:sld xmlns:a="http://schemas.openxmlformats.org/drawingml/2006/main" xmlns:r="http://schemas.openxmlformats.org/officeDocument/2006/relationships" xmlns:p="http://schemas.openxmlformats.org/presentationml/2006/main">
+  <p:cSld>
+    <p:spTree>
+      <p:nvGrpSpPr>
+        <p:cNvPr id="1" name=""/>
+        <p:cNvGrpSpPr/>
+        <p:nvPr/>
+      </p:nvGrpSpPr>
+      <p:grpSpPr>
+        <a:xfrm>
+          <a:off x="0" y="0"/>
+          <a:ext cx="0" cy="0"/>
+          <a:chOff x="0" y="0"/>
+          <a:chExt cx="0" cy="0"/>
+        </a:xfrm>
+      </p:grpSpPr>
+      <p:sp>
+        <p:nvSpPr>
+          <p:cNvPr id="2" name="Title 1">
+            <a:extLst>
+              <a:ext uri="{FF2B5EF4-FFF2-40B4-BE49-F238E27FC236}">
+                <a16:creationId xmlns:a16="http://schemas.microsoft.com/office/drawing/2014/main" id="{206C2C50-E5DC-4956-8523-615BE1991524}"/>
+              </a:ext>
+            </a:extLst>
+          </p:cNvPr>
+          <p:cNvSpPr>
+            <a:spLocks noGrp="1"/>
+          </p:cNvSpPr>
+          <p:nvPr>
+            <p:ph type="title"/>
+          </p:nvPr>
+        </p:nvSpPr>
+        <p:spPr/>
+        <p:txBody>
+          <a:bodyPr/>
+          <a:lstStyle/>
+          <a:p>
+            <a:endParaRPr lang="en-CA" dirty="0"/>
+          </a:p>
+        </p:txBody>
+      </p:sp>
+      <p:pic>
+        <p:nvPicPr>
+          <p:cNvPr id="5" name="Content Placeholder 4">
+            <a:extLst>
+              <a:ext uri="{FF2B5EF4-FFF2-40B4-BE49-F238E27FC236}">
+                <a16:creationId xmlns:a16="http://schemas.microsoft.com/office/drawing/2014/main" id="{FF5FF54B-FB58-7353-46A1-CF8DF705AD3D}"/>
+              </a:ext>
+            </a:extLst>
+          </p:cNvPr>
+          <p:cNvPicPr>
+            <a:picLocks noGrp="1" noChangeAspect="1"/>
+          </p:cNvPicPr>
+          <p:nvPr>
+            <p:ph idx="1"/>
+          </p:nvPr>
+        </p:nvPicPr>
+        <p:blipFill>
+          <a:blip r:embed="rId2">
+            <a:extLst>
+              <a:ext uri="{28A0092B-C50C-407E-A947-70E740481C1C}">
+                <a14:useLocalDpi xmlns:a14="http://schemas.microsoft.com/office/drawing/2010/main" val="0"/>
+              </a:ext>
+            </a:extLst>
+          </a:blip>
+          <a:stretch>
+            <a:fillRect/>
+          </a:stretch>
+        </p:blipFill>
+        <p:spPr>
+          <a:xfrm>
+            <a:off x="769374" y="1189507"/>
+            <a:ext cx="10515600" cy="4168400"/>
+          </a:xfrm>
+          <a:prstGeom prst="rect">
+            <a:avLst/>
+          </a:prstGeom>
+        </p:spPr>
+      </p:pic>
+    </p:spTree>
+    <p:extLst>
+      <p:ext uri="{BB962C8B-B14F-4D97-AF65-F5344CB8AC3E}">
+        <p14:creationId xmlns:p14="http://schemas.microsoft.com/office/powerpoint/2010/main" val="748984885"/>
+      </p:ext>
+    </p:extLst>
+  </p:cSld>
+  <p:clrMapOvr>
+    <a:masterClrMapping/>
+  </p:clrMapOvr>
+</p:sld>
+</file>
+
+<file path=ppt/slides/slide26.xml><?xml version="1.0" encoding="utf-8"?>
+<p:sld xmlns:a="http://schemas.openxmlformats.org/drawingml/2006/main" xmlns:r="http://schemas.openxmlformats.org/officeDocument/2006/relationships" xmlns:p="http://schemas.openxmlformats.org/presentationml/2006/main">
+  <p:cSld>
+    <p:spTree>
+      <p:nvGrpSpPr>
+        <p:cNvPr id="1" name=""/>
+        <p:cNvGrpSpPr/>
+        <p:nvPr/>
+      </p:nvGrpSpPr>
+      <p:grpSpPr>
+        <a:xfrm>
+          <a:off x="0" y="0"/>
+          <a:ext cx="0" cy="0"/>
+          <a:chOff x="0" y="0"/>
+          <a:chExt cx="0" cy="0"/>
+        </a:xfrm>
+      </p:grpSpPr>
+      <p:sp>
+        <p:nvSpPr>
+          <p:cNvPr id="2" name="Title 1">
+            <a:extLst>
+              <a:ext uri="{FF2B5EF4-FFF2-40B4-BE49-F238E27FC236}">
+                <a16:creationId xmlns:a16="http://schemas.microsoft.com/office/drawing/2014/main" id="{D356F460-039D-2F7A-7F69-C00769DFB79A}"/>
+              </a:ext>
+            </a:extLst>
+          </p:cNvPr>
+          <p:cNvSpPr>
+            <a:spLocks noGrp="1"/>
+          </p:cNvSpPr>
+          <p:nvPr>
+            <p:ph type="title"/>
+          </p:nvPr>
+        </p:nvSpPr>
+        <p:spPr/>
+        <p:txBody>
+          <a:bodyPr/>
+          <a:lstStyle/>
+          <a:p>
+            <a:r>
+              <a:rPr lang="en-CA" dirty="0"/>
+              <a:t>Sentiment Extraction</a:t>
+            </a:r>
+          </a:p>
+        </p:txBody>
+      </p:sp>
+      <p:sp>
+        <p:nvSpPr>
+          <p:cNvPr id="3" name="Content Placeholder 2">
+            <a:extLst>
+              <a:ext uri="{FF2B5EF4-FFF2-40B4-BE49-F238E27FC236}">
+                <a16:creationId xmlns:a16="http://schemas.microsoft.com/office/drawing/2014/main" id="{C151A218-00D6-B14E-4C5C-BAD0800C5AC9}"/>
+              </a:ext>
+            </a:extLst>
+          </p:cNvPr>
+          <p:cNvSpPr>
+            <a:spLocks noGrp="1"/>
+          </p:cNvSpPr>
+          <p:nvPr>
+            <p:ph idx="1"/>
+          </p:nvPr>
+        </p:nvSpPr>
+        <p:spPr/>
+        <p:txBody>
+          <a:bodyPr/>
+          <a:lstStyle/>
+          <a:p>
+            <a:r>
+              <a:rPr lang="en-CA" dirty="0"/>
+              <a:t>Categorized clauses are individually fed into </a:t>
+            </a:r>
+            <a:r>
+              <a:rPr lang="en-CA" i="1" dirty="0" err="1"/>
+              <a:t>roberta</a:t>
+            </a:r>
+            <a:r>
+              <a:rPr lang="en-CA" i="1" dirty="0"/>
+              <a:t>-base-</a:t>
+            </a:r>
+            <a:r>
+              <a:rPr lang="en-CA" i="1" dirty="0" err="1"/>
+              <a:t>go_emotions</a:t>
+            </a:r>
+            <a:endParaRPr lang="en-CA" i="1" dirty="0"/>
+          </a:p>
+          <a:p>
+            <a:r>
+              <a:rPr lang="en-CA" dirty="0"/>
+              <a:t>Model trained from </a:t>
+            </a:r>
+            <a:r>
+              <a:rPr lang="en-CA" u="sng" dirty="0" err="1">
+                <a:hlinkClick r:id="rId2"/>
+              </a:rPr>
+              <a:t>roberta</a:t>
+            </a:r>
+            <a:r>
+              <a:rPr lang="en-CA" u="sng" dirty="0">
+                <a:hlinkClick r:id="rId2"/>
+              </a:rPr>
+              <a:t>-base</a:t>
+            </a:r>
+            <a:r>
+              <a:rPr lang="en-CA" dirty="0"/>
+              <a:t> on the </a:t>
+            </a:r>
+            <a:r>
+              <a:rPr lang="en-CA" u="sng" dirty="0" err="1">
+                <a:hlinkClick r:id="rId3"/>
+              </a:rPr>
+              <a:t>go_emotions</a:t>
+            </a:r>
+            <a:r>
+              <a:rPr lang="en-CA" dirty="0"/>
+              <a:t> dataset (reddit comments) for multi-label classification.</a:t>
+            </a:r>
+          </a:p>
+          <a:p>
+            <a:r>
+              <a:rPr lang="en-CA" dirty="0"/>
+              <a:t>Outputs a 28-dimensional emotional probability vector.</a:t>
+            </a:r>
+          </a:p>
+          <a:p>
+            <a:r>
+              <a:rPr lang="en-CA" dirty="0"/>
+              <a:t>INT8 quantized ONNX model was used. </a:t>
+            </a:r>
+          </a:p>
+        </p:txBody>
+      </p:sp>
+    </p:spTree>
+    <p:extLst>
+      <p:ext uri="{BB962C8B-B14F-4D97-AF65-F5344CB8AC3E}">
+        <p14:creationId xmlns:p14="http://schemas.microsoft.com/office/powerpoint/2010/main" val="1813553165"/>
+      </p:ext>
+    </p:extLst>
+  </p:cSld>
+  <p:clrMapOvr>
+    <a:masterClrMapping/>
+  </p:clrMapOvr>
+</p:sld>
+</file>
+
+<file path=ppt/slides/slide27.xml><?xml version="1.0" encoding="utf-8"?>
+<p:sld xmlns:a="http://schemas.openxmlformats.org/drawingml/2006/main" xmlns:r="http://schemas.openxmlformats.org/officeDocument/2006/relationships" xmlns:p="http://schemas.openxmlformats.org/presentationml/2006/main">
+  <p:cSld>
+    <p:spTree>
+      <p:nvGrpSpPr>
+        <p:cNvPr id="1" name=""/>
+        <p:cNvGrpSpPr/>
+        <p:nvPr/>
+      </p:nvGrpSpPr>
+      <p:grpSpPr>
+        <a:xfrm>
+          <a:off x="0" y="0"/>
+          <a:ext cx="0" cy="0"/>
+          <a:chOff x="0" y="0"/>
+          <a:chExt cx="0" cy="0"/>
+        </a:xfrm>
+      </p:grpSpPr>
+      <p:sp>
+        <p:nvSpPr>
+          <p:cNvPr id="2" name="Title 1">
+            <a:extLst>
+              <a:ext uri="{FF2B5EF4-FFF2-40B4-BE49-F238E27FC236}">
+                <a16:creationId xmlns:a16="http://schemas.microsoft.com/office/drawing/2014/main" id="{22A5BE56-B6FB-DFAF-4E1A-1A1FC6E20F1E}"/>
+              </a:ext>
+            </a:extLst>
+          </p:cNvPr>
+          <p:cNvSpPr>
+            <a:spLocks noGrp="1"/>
+          </p:cNvSpPr>
+          <p:nvPr>
+            <p:ph type="title"/>
+          </p:nvPr>
+        </p:nvSpPr>
+        <p:spPr/>
+        <p:txBody>
+          <a:bodyPr/>
+          <a:lstStyle/>
+          <a:p>
+            <a:r>
+              <a:rPr lang="en-CA" dirty="0"/>
+              <a:t>Feature Aggregation per Review</a:t>
+            </a:r>
+          </a:p>
+        </p:txBody>
+      </p:sp>
+      <p:sp>
+        <p:nvSpPr>
+          <p:cNvPr id="3" name="Content Placeholder 2">
+            <a:extLst>
+              <a:ext uri="{FF2B5EF4-FFF2-40B4-BE49-F238E27FC236}">
+                <a16:creationId xmlns:a16="http://schemas.microsoft.com/office/drawing/2014/main" id="{FE049266-B8CA-BD63-668E-5BE4138EF7FE}"/>
+              </a:ext>
+            </a:extLst>
+          </p:cNvPr>
+          <p:cNvSpPr>
+            <a:spLocks noGrp="1"/>
+          </p:cNvSpPr>
+          <p:nvPr>
+            <p:ph idx="1"/>
+          </p:nvPr>
+        </p:nvSpPr>
+        <p:spPr/>
+        <p:txBody>
+          <a:bodyPr>
+            <a:normAutofit/>
+          </a:bodyPr>
+          <a:lstStyle/>
+          <a:p>
+            <a:r>
+              <a:rPr lang="en-CA" dirty="0"/>
+              <a:t>4 Categories – each with </a:t>
+            </a:r>
+            <a:r>
+              <a:rPr lang="en-CA" dirty="0" err="1"/>
+              <a:t>with</a:t>
+            </a:r>
+            <a:r>
+              <a:rPr lang="en-CA" dirty="0"/>
+              <a:t> 27 features</a:t>
+            </a:r>
+          </a:p>
+          <a:p>
+            <a:r>
+              <a:rPr lang="en-CA" dirty="0"/>
+              <a:t>Reviews can contain multiple different categories of clauses.</a:t>
+            </a:r>
+          </a:p>
+          <a:p>
+            <a:r>
+              <a:rPr lang="en-CA" dirty="0"/>
+              <a:t>How to obtain a single feature vector per review?</a:t>
+            </a:r>
+          </a:p>
+          <a:p>
+            <a:r>
+              <a:rPr lang="en-CA" dirty="0"/>
+              <a:t>Combine all categories into one vector across a review’s clauses</a:t>
+            </a:r>
+          </a:p>
+          <a:p>
+            <a:r>
+              <a:rPr lang="en-CA" dirty="0"/>
+              <a:t>Average out emotional contributions directed towards the same category</a:t>
+            </a:r>
+          </a:p>
+          <a:p>
+            <a:r>
+              <a:rPr lang="en-CA" dirty="0"/>
+              <a:t>Impute 0’s if the category was not mentioned.</a:t>
+            </a:r>
+          </a:p>
+          <a:p>
+            <a:pPr marL="0" indent="0">
+              <a:buNone/>
+            </a:pPr>
+            <a:r>
+              <a:rPr lang="en-CA" dirty="0"/>
+              <a:t> </a:t>
+            </a:r>
+          </a:p>
+        </p:txBody>
+      </p:sp>
+    </p:spTree>
+    <p:extLst>
+      <p:ext uri="{BB962C8B-B14F-4D97-AF65-F5344CB8AC3E}">
+        <p14:creationId xmlns:p14="http://schemas.microsoft.com/office/powerpoint/2010/main" val="4044520796"/>
+      </p:ext>
+    </p:extLst>
+  </p:cSld>
+  <p:clrMapOvr>
+    <a:masterClrMapping/>
+  </p:clrMapOvr>
+</p:sld>
+</file>
+
+<file path=ppt/slides/slide28.xml><?xml version="1.0" encoding="utf-8"?>
+<p:sld xmlns:a="http://schemas.openxmlformats.org/drawingml/2006/main" xmlns:r="http://schemas.openxmlformats.org/officeDocument/2006/relationships" xmlns:p="http://schemas.openxmlformats.org/presentationml/2006/main">
+  <p:cSld>
+    <p:spTree>
+      <p:nvGrpSpPr>
+        <p:cNvPr id="1" name=""/>
+        <p:cNvGrpSpPr/>
+        <p:nvPr/>
+      </p:nvGrpSpPr>
+      <p:grpSpPr>
+        <a:xfrm>
+          <a:off x="0" y="0"/>
+          <a:ext cx="0" cy="0"/>
+          <a:chOff x="0" y="0"/>
+          <a:chExt cx="0" cy="0"/>
+        </a:xfrm>
+      </p:grpSpPr>
+      <p:sp>
+        <p:nvSpPr>
+          <p:cNvPr id="2" name="Title 1">
+            <a:extLst>
+              <a:ext uri="{FF2B5EF4-FFF2-40B4-BE49-F238E27FC236}">
+                <a16:creationId xmlns:a16="http://schemas.microsoft.com/office/drawing/2014/main" id="{E7867A2D-DF4E-8BE0-9812-5F0DDA089D23}"/>
+              </a:ext>
+            </a:extLst>
+          </p:cNvPr>
+          <p:cNvSpPr>
+            <a:spLocks noGrp="1"/>
+          </p:cNvSpPr>
+          <p:nvPr>
+            <p:ph type="title"/>
+          </p:nvPr>
+        </p:nvSpPr>
+        <p:spPr/>
+        <p:txBody>
+          <a:bodyPr/>
+          <a:lstStyle/>
+          <a:p>
+            <a:r>
+              <a:rPr lang="en-CA" dirty="0"/>
+              <a:t>Feature Aggregation Cont.</a:t>
+            </a:r>
+          </a:p>
+        </p:txBody>
+      </p:sp>
+      <p:sp>
+        <p:nvSpPr>
+          <p:cNvPr id="3" name="Content Placeholder 2">
+            <a:extLst>
+              <a:ext uri="{FF2B5EF4-FFF2-40B4-BE49-F238E27FC236}">
+                <a16:creationId xmlns:a16="http://schemas.microsoft.com/office/drawing/2014/main" id="{D375E57F-C332-40DD-9A4E-8D974F367A70}"/>
+              </a:ext>
+            </a:extLst>
+          </p:cNvPr>
+          <p:cNvSpPr>
+            <a:spLocks noGrp="1"/>
+          </p:cNvSpPr>
+          <p:nvPr>
+            <p:ph idx="1"/>
+          </p:nvPr>
+        </p:nvSpPr>
+        <p:spPr/>
+        <p:txBody>
+          <a:bodyPr/>
+          <a:lstStyle/>
+          <a:p>
+            <a:r>
+              <a:rPr lang="en-CA" dirty="0"/>
+              <a:t>Final feature vector per review = 27 x 4 + (</a:t>
+            </a:r>
+            <a:r>
+              <a:rPr lang="en-CA" dirty="0" err="1"/>
+              <a:t>D_misc</a:t>
+            </a:r>
+            <a:r>
+              <a:rPr lang="en-CA" dirty="0"/>
+              <a:t>, </a:t>
+            </a:r>
+            <a:r>
+              <a:rPr lang="en-CA" dirty="0" err="1"/>
+              <a:t>D_eff</a:t>
+            </a:r>
+            <a:r>
+              <a:rPr lang="en-CA" dirty="0"/>
+              <a:t>, </a:t>
+            </a:r>
+            <a:r>
+              <a:rPr lang="en-CA" dirty="0" err="1"/>
+              <a:t>D_work</a:t>
+            </a:r>
+            <a:r>
+              <a:rPr lang="en-CA" dirty="0"/>
+              <a:t>, </a:t>
+            </a:r>
+            <a:r>
+              <a:rPr lang="en-CA" dirty="0" err="1"/>
+              <a:t>D_fair</a:t>
+            </a:r>
+            <a:r>
+              <a:rPr lang="en-CA" dirty="0"/>
+              <a:t>) = 112 features</a:t>
+            </a:r>
+          </a:p>
+          <a:p>
+            <a:endParaRPr lang="en-CA" dirty="0"/>
+          </a:p>
+          <a:p>
+            <a:r>
+              <a:rPr lang="en-CA" dirty="0" err="1"/>
+              <a:t>D_misc</a:t>
+            </a:r>
+            <a:r>
+              <a:rPr lang="en-CA" dirty="0"/>
+              <a:t> = </a:t>
+            </a:r>
+            <a:r>
+              <a:rPr lang="en-CA" i="1" dirty="0"/>
+              <a:t>Miscellaneous density</a:t>
+            </a:r>
+          </a:p>
+          <a:p>
+            <a:r>
+              <a:rPr lang="en-CA" dirty="0" err="1"/>
+              <a:t>D_eff</a:t>
+            </a:r>
+            <a:r>
+              <a:rPr lang="en-CA" dirty="0"/>
+              <a:t> = </a:t>
+            </a:r>
+            <a:r>
+              <a:rPr lang="en-CA" i="1" dirty="0" err="1"/>
+              <a:t>Intructional</a:t>
+            </a:r>
+            <a:r>
+              <a:rPr lang="en-CA" i="1" dirty="0"/>
+              <a:t> Effectiveness density</a:t>
+            </a:r>
+          </a:p>
+          <a:p>
+            <a:r>
+              <a:rPr lang="en-CA" dirty="0"/>
+              <a:t>etc. </a:t>
+            </a:r>
+          </a:p>
+        </p:txBody>
+      </p:sp>
+    </p:spTree>
+    <p:extLst>
+      <p:ext uri="{BB962C8B-B14F-4D97-AF65-F5344CB8AC3E}">
+        <p14:creationId xmlns:p14="http://schemas.microsoft.com/office/powerpoint/2010/main" val="1276375957"/>
+      </p:ext>
+    </p:extLst>
+  </p:cSld>
+  <p:clrMapOvr>
+    <a:masterClrMapping/>
+  </p:clrMapOvr>
+</p:sld>
+</file>
+
+<file path=ppt/slides/slide29.xml><?xml version="1.0" encoding="utf-8"?>
+<p:sld xmlns:a="http://schemas.openxmlformats.org/drawingml/2006/main" xmlns:r="http://schemas.openxmlformats.org/officeDocument/2006/relationships" xmlns:p="http://schemas.openxmlformats.org/presentationml/2006/main">
+  <p:cSld>
+    <p:spTree>
+      <p:nvGrpSpPr>
+        <p:cNvPr id="1" name=""/>
+        <p:cNvGrpSpPr/>
+        <p:nvPr/>
+      </p:nvGrpSpPr>
+      <p:grpSpPr>
+        <a:xfrm>
+          <a:off x="0" y="0"/>
+          <a:ext cx="0" cy="0"/>
+          <a:chOff x="0" y="0"/>
+          <a:chExt cx="0" cy="0"/>
+        </a:xfrm>
+      </p:grpSpPr>
+      <p:sp>
+        <p:nvSpPr>
+          <p:cNvPr id="2" name="Title 1">
+            <a:extLst>
+              <a:ext uri="{FF2B5EF4-FFF2-40B4-BE49-F238E27FC236}">
+                <a16:creationId xmlns:a16="http://schemas.microsoft.com/office/drawing/2014/main" id="{930A3B9F-328D-83A3-FA61-BAC394916531}"/>
+              </a:ext>
+            </a:extLst>
+          </p:cNvPr>
+          <p:cNvSpPr>
+            <a:spLocks noGrp="1"/>
+          </p:cNvSpPr>
+          <p:nvPr>
+            <p:ph type="title"/>
+          </p:nvPr>
+        </p:nvSpPr>
+        <p:spPr/>
+        <p:txBody>
+          <a:bodyPr/>
+          <a:lstStyle/>
+          <a:p>
+            <a:r>
+              <a:rPr lang="en-CA" dirty="0" err="1"/>
+              <a:t>CatBoost</a:t>
+            </a:r>
+            <a:r>
+              <a:rPr lang="en-CA" dirty="0"/>
+              <a:t> Modeling</a:t>
+            </a:r>
+          </a:p>
+        </p:txBody>
+      </p:sp>
+      <p:sp>
+        <p:nvSpPr>
+          <p:cNvPr id="3" name="Content Placeholder 2">
+            <a:extLst>
+              <a:ext uri="{FF2B5EF4-FFF2-40B4-BE49-F238E27FC236}">
+                <a16:creationId xmlns:a16="http://schemas.microsoft.com/office/drawing/2014/main" id="{FDB7E54B-A473-5D70-47DC-7FAAF48CF6CB}"/>
+              </a:ext>
+            </a:extLst>
+          </p:cNvPr>
+          <p:cNvSpPr>
+            <a:spLocks noGrp="1"/>
+          </p:cNvSpPr>
+          <p:nvPr>
+            <p:ph idx="1"/>
+          </p:nvPr>
+        </p:nvSpPr>
+        <p:spPr/>
+        <p:txBody>
+          <a:bodyPr/>
+          <a:lstStyle/>
+          <a:p>
+            <a:r>
+              <a:rPr lang="en-CA" dirty="0"/>
+              <a:t>A gradient boosted tree-based modeling library. Can be used for categorical or numerical data (regression).</a:t>
+            </a:r>
+          </a:p>
+          <a:p>
+            <a:r>
+              <a:rPr lang="en-CA" dirty="0"/>
+              <a:t>Highly effective for sparse data (remember the imputed 0’s) and non-linear data.</a:t>
+            </a:r>
+          </a:p>
+          <a:p>
+            <a:r>
+              <a:rPr lang="en-CA" dirty="0"/>
+              <a:t>Ratings are modeled as a function of their categorical emotional features (+ densities).</a:t>
+            </a:r>
+          </a:p>
+          <a:p>
+            <a:r>
+              <a:rPr lang="en-CA" dirty="0"/>
+              <a:t>Professor-level grouped split and 5-fold CV.</a:t>
+            </a:r>
+          </a:p>
+          <a:p>
+            <a:pPr marL="0" indent="0">
+              <a:buNone/>
+            </a:pPr>
+            <a:r>
+              <a:rPr lang="en-CA" dirty="0"/>
+              <a:t>Model is saved after training.</a:t>
+            </a:r>
+          </a:p>
+          <a:p>
+            <a:pPr marL="0" indent="0">
+              <a:buNone/>
+            </a:pPr>
+            <a:r>
+              <a:rPr lang="en-CA" dirty="0"/>
+              <a:t>Baseline predictions are also preserved.</a:t>
+            </a:r>
+          </a:p>
+        </p:txBody>
+      </p:sp>
+    </p:spTree>
+    <p:extLst>
+      <p:ext uri="{BB962C8B-B14F-4D97-AF65-F5344CB8AC3E}">
+        <p14:creationId xmlns:p14="http://schemas.microsoft.com/office/powerpoint/2010/main" val="3629580290"/>
+      </p:ext>
+    </p:extLst>
+  </p:cSld>
+  <p:clrMapOvr>
+    <a:masterClrMapping/>
+  </p:clrMapOvr>
+</p:sld>
+</file>
+
 <file path=ppt/slides/slide3.xml><?xml version="1.0" encoding="utf-8"?>
 <p:sld xmlns:a="http://schemas.openxmlformats.org/drawingml/2006/main" xmlns:r="http://schemas.openxmlformats.org/officeDocument/2006/relationships" xmlns:p="http://schemas.openxmlformats.org/presentationml/2006/main">
   <p:cSld>
@@ -5015,6 +6752,556 @@
     <p:extLst>
       <p:ext uri="{BB962C8B-B14F-4D97-AF65-F5344CB8AC3E}">
         <p14:creationId xmlns:p14="http://schemas.microsoft.com/office/powerpoint/2010/main" val="2925075520"/>
+      </p:ext>
+    </p:extLst>
+  </p:cSld>
+  <p:clrMapOvr>
+    <a:masterClrMapping/>
+  </p:clrMapOvr>
+</p:sld>
+</file>
+
+<file path=ppt/slides/slide30.xml><?xml version="1.0" encoding="utf-8"?>
+<p:sld xmlns:a="http://schemas.openxmlformats.org/drawingml/2006/main" xmlns:r="http://schemas.openxmlformats.org/officeDocument/2006/relationships" xmlns:p="http://schemas.openxmlformats.org/presentationml/2006/main">
+  <p:cSld>
+    <p:spTree>
+      <p:nvGrpSpPr>
+        <p:cNvPr id="1" name=""/>
+        <p:cNvGrpSpPr/>
+        <p:nvPr/>
+      </p:nvGrpSpPr>
+      <p:grpSpPr>
+        <a:xfrm>
+          <a:off x="0" y="0"/>
+          <a:ext cx="0" cy="0"/>
+          <a:chOff x="0" y="0"/>
+          <a:chExt cx="0" cy="0"/>
+        </a:xfrm>
+      </p:grpSpPr>
+      <p:sp>
+        <p:nvSpPr>
+          <p:cNvPr id="2" name="Title 1">
+            <a:extLst>
+              <a:ext uri="{FF2B5EF4-FFF2-40B4-BE49-F238E27FC236}">
+                <a16:creationId xmlns:a16="http://schemas.microsoft.com/office/drawing/2014/main" id="{3E2425B0-0490-863D-FA1D-33B9617B3E1B}"/>
+              </a:ext>
+            </a:extLst>
+          </p:cNvPr>
+          <p:cNvSpPr>
+            <a:spLocks noGrp="1"/>
+          </p:cNvSpPr>
+          <p:nvPr>
+            <p:ph type="title"/>
+          </p:nvPr>
+        </p:nvSpPr>
+        <p:spPr/>
+        <p:txBody>
+          <a:bodyPr/>
+          <a:lstStyle/>
+          <a:p>
+            <a:r>
+              <a:rPr lang="en-CA" dirty="0"/>
+              <a:t>Validity-Weighted Attenuation</a:t>
+            </a:r>
+          </a:p>
+        </p:txBody>
+      </p:sp>
+      <mc:AlternateContent xmlns:mc="http://schemas.openxmlformats.org/markup-compatibility/2006">
+        <mc:Choice xmlns:a14="http://schemas.microsoft.com/office/drawing/2010/main" Requires="a14">
+          <p:sp>
+            <p:nvSpPr>
+              <p:cNvPr id="3" name="Content Placeholder 2">
+                <a:extLst>
+                  <a:ext uri="{FF2B5EF4-FFF2-40B4-BE49-F238E27FC236}">
+                    <a16:creationId xmlns:a16="http://schemas.microsoft.com/office/drawing/2014/main" id="{1437B41E-A3C0-2FF2-983A-6309E1EAD5BC}"/>
+                  </a:ext>
+                </a:extLst>
+              </p:cNvPr>
+              <p:cNvSpPr>
+                <a:spLocks noGrp="1"/>
+              </p:cNvSpPr>
+              <p:nvPr>
+                <p:ph idx="1"/>
+              </p:nvPr>
+            </p:nvSpPr>
+            <p:spPr/>
+            <p:txBody>
+              <a:bodyPr/>
+              <a:lstStyle/>
+              <a:p>
+                <a:pPr marL="0" indent="0">
+                  <a:buNone/>
+                </a:pPr>
+                <a:r>
+                  <a:rPr lang="en-CA" i="1" dirty="0"/>
+                  <a:t>Misc</a:t>
+                </a:r>
+                <a:r>
+                  <a:rPr lang="en-CA" dirty="0"/>
+                  <a:t> emotions are down-weighted by</a:t>
+                </a:r>
+                <a:r>
+                  <a:rPr lang="en-CA" i="1" dirty="0">
+                    <a:latin typeface="Cambria Math" panose="02040503050406030204" pitchFamily="18" charset="0"/>
+                  </a:rPr>
+                  <a:t> zeta</a:t>
+                </a:r>
+              </a:p>
+              <a:p>
+                <a:pPr marL="0" indent="0">
+                  <a:buNone/>
+                </a:pPr>
+                <a14:m>
+                  <m:oMathPara xmlns:m="http://schemas.openxmlformats.org/officeDocument/2006/math">
+                    <m:oMath>
+                      <m:r>
+                        <a:rPr lang="nl-NL" i="1" smtClean="0">
+                          <a:latin typeface="Cambria Math" panose="02040503050406030204" pitchFamily="18" charset="0"/>
+                        </a:rPr>
+                        <m:t>𝜁</m:t>
+                      </m:r>
+                      <m:r>
+                        <a:rPr lang="nl-NL" i="1" smtClean="0">
+                          <a:latin typeface="Cambria Math" panose="02040503050406030204" pitchFamily="18" charset="0"/>
+                        </a:rPr>
+                        <m:t>=1−</m:t>
+                      </m:r>
+                      <m:sSup>
+                        <m:sSupPr>
+                          <m:ctrlPr>
+                            <a:rPr lang="nl-NL" i="1">
+                              <a:latin typeface="Cambria Math" panose="02040503050406030204" pitchFamily="18" charset="0"/>
+                            </a:rPr>
+                          </m:ctrlPr>
+                        </m:sSupPr>
+                        <m:e>
+                          <m:d>
+                            <m:dPr>
+                              <m:ctrlPr>
+                                <a:rPr lang="nl-NL" i="1">
+                                  <a:latin typeface="Cambria Math" panose="02040503050406030204" pitchFamily="18" charset="0"/>
+                                </a:rPr>
+                              </m:ctrlPr>
+                            </m:dPr>
+                            <m:e>
+                              <m:sSub>
+                                <m:sSubPr>
+                                  <m:ctrlPr>
+                                    <a:rPr lang="nl-NL" i="1">
+                                      <a:latin typeface="Cambria Math" panose="02040503050406030204" pitchFamily="18" charset="0"/>
+                                    </a:rPr>
+                                  </m:ctrlPr>
+                                </m:sSubPr>
+                                <m:e>
+                                  <m:r>
+                                    <a:rPr lang="nl-NL" i="1">
+                                      <a:latin typeface="Cambria Math" panose="02040503050406030204" pitchFamily="18" charset="0"/>
+                                    </a:rPr>
+                                    <m:t>𝐷</m:t>
+                                  </m:r>
+                                </m:e>
+                                <m:sub>
+                                  <m:r>
+                                    <a:rPr lang="nl-NL" i="1">
+                                      <a:latin typeface="Cambria Math" panose="02040503050406030204" pitchFamily="18" charset="0"/>
+                                    </a:rPr>
+                                    <m:t>𝑚𝑖𝑠𝑐</m:t>
+                                  </m:r>
+                                </m:sub>
+                              </m:sSub>
+                            </m:e>
+                          </m:d>
+                        </m:e>
+                        <m:sup>
+                          <m:r>
+                            <a:rPr lang="nl-NL" i="1">
+                              <a:latin typeface="Cambria Math" panose="02040503050406030204" pitchFamily="18" charset="0"/>
+                            </a:rPr>
+                            <m:t>𝑠</m:t>
+                          </m:r>
+                        </m:sup>
+                      </m:sSup>
+                    </m:oMath>
+                  </m:oMathPara>
+                </a14:m>
+                <a:endParaRPr lang="en-CA" dirty="0">
+                  <a:latin typeface="Cambria Math" panose="02040503050406030204" pitchFamily="18" charset="0"/>
+                </a:endParaRPr>
+              </a:p>
+              <a:p>
+                <a:pPr marL="0" indent="0">
+                  <a:buNone/>
+                </a:pPr>
+                <a:r>
+                  <a:rPr lang="en-CA" dirty="0">
+                    <a:latin typeface="Cambria Math" panose="02040503050406030204" pitchFamily="18" charset="0"/>
+                  </a:rPr>
+                  <a:t>S controls the non-linearity of zeta</a:t>
+                </a:r>
+              </a:p>
+              <a:p>
+                <a:pPr marL="0" indent="0">
+                  <a:buNone/>
+                </a:pPr>
+                <a:r>
+                  <a:rPr lang="en-CA" dirty="0">
+                    <a:latin typeface="Cambria Math" panose="02040503050406030204" pitchFamily="18" charset="0"/>
+                  </a:rPr>
+                  <a:t>As </a:t>
+                </a:r>
+                <a:r>
+                  <a:rPr lang="en-CA" dirty="0" err="1">
+                    <a:latin typeface="Cambria Math" panose="02040503050406030204" pitchFamily="18" charset="0"/>
+                  </a:rPr>
+                  <a:t>D_misc</a:t>
+                </a:r>
+                <a:r>
+                  <a:rPr lang="en-CA" dirty="0">
+                    <a:latin typeface="Cambria Math" panose="02040503050406030204" pitchFamily="18" charset="0"/>
+                  </a:rPr>
+                  <a:t> increases, zeta decreases</a:t>
+                </a:r>
+              </a:p>
+              <a:p>
+                <a:pPr marL="0" indent="0">
+                  <a:buNone/>
+                </a:pPr>
+                <a:r>
+                  <a:rPr lang="en-CA" i="1" dirty="0" err="1">
+                    <a:latin typeface="Cambria Math" panose="02040503050406030204" pitchFamily="18" charset="0"/>
+                  </a:rPr>
+                  <a:t>Misc</a:t>
+                </a:r>
+                <a:r>
+                  <a:rPr lang="en-CA" dirty="0">
+                    <a:latin typeface="Cambria Math" panose="02040503050406030204" pitchFamily="18" charset="0"/>
+                  </a:rPr>
+                  <a:t> emotions are proportionally down-weighted with respect to </a:t>
+                </a:r>
+                <a:r>
+                  <a:rPr lang="en-CA" dirty="0" err="1">
+                    <a:latin typeface="Cambria Math" panose="02040503050406030204" pitchFamily="18" charset="0"/>
+                  </a:rPr>
+                  <a:t>D_misc</a:t>
+                </a:r>
+                <a:endParaRPr lang="en-CA" dirty="0">
+                  <a:latin typeface="Cambria Math" panose="02040503050406030204" pitchFamily="18" charset="0"/>
+                </a:endParaRPr>
+              </a:p>
+              <a:p>
+                <a:pPr marL="0" indent="0">
+                  <a:buNone/>
+                </a:pPr>
+                <a:r>
+                  <a:rPr lang="en-CA" dirty="0">
+                    <a:latin typeface="Cambria Math" panose="02040503050406030204" pitchFamily="18" charset="0"/>
+                  </a:rPr>
+                  <a:t>All other features are preserved.</a:t>
+                </a:r>
+              </a:p>
+              <a:p>
+                <a:pPr marL="0" indent="0">
+                  <a:buNone/>
+                </a:pPr>
+                <a:endParaRPr lang="en-CA" dirty="0">
+                  <a:latin typeface="Cambria Math" panose="02040503050406030204" pitchFamily="18" charset="0"/>
+                </a:endParaRPr>
+              </a:p>
+              <a:p>
+                <a:pPr marL="0" indent="0">
+                  <a:buNone/>
+                </a:pPr>
+                <a:endParaRPr lang="en-CA" b="0" dirty="0"/>
+              </a:p>
+              <a:p>
+                <a:pPr marL="0" indent="0">
+                  <a:buNone/>
+                </a:pPr>
+                <a:endParaRPr lang="en-CA" i="1" dirty="0"/>
+              </a:p>
+            </p:txBody>
+          </p:sp>
+        </mc:Choice>
+        <mc:Fallback>
+          <p:sp>
+            <p:nvSpPr>
+              <p:cNvPr id="3" name="Content Placeholder 2">
+                <a:extLst>
+                  <a:ext uri="{FF2B5EF4-FFF2-40B4-BE49-F238E27FC236}">
+                    <a16:creationId xmlns:a16="http://schemas.microsoft.com/office/drawing/2014/main" id="{1437B41E-A3C0-2FF2-983A-6309E1EAD5BC}"/>
+                  </a:ext>
+                </a:extLst>
+              </p:cNvPr>
+              <p:cNvSpPr>
+                <a:spLocks noGrp="1" noRot="1" noChangeAspect="1" noMove="1" noResize="1" noEditPoints="1" noAdjustHandles="1" noChangeArrowheads="1" noChangeShapeType="1" noTextEdit="1"/>
+              </p:cNvSpPr>
+              <p:nvPr>
+                <p:ph idx="1"/>
+              </p:nvPr>
+            </p:nvSpPr>
+            <p:spPr>
+              <a:blipFill>
+                <a:blip r:embed="rId2"/>
+                <a:stretch>
+                  <a:fillRect l="-1217" t="-2801"/>
+                </a:stretch>
+              </a:blipFill>
+            </p:spPr>
+            <p:txBody>
+              <a:bodyPr/>
+              <a:lstStyle/>
+              <a:p>
+                <a:r>
+                  <a:rPr lang="en-CA">
+                    <a:noFill/>
+                  </a:rPr>
+                  <a:t> </a:t>
+                </a:r>
+              </a:p>
+            </p:txBody>
+          </p:sp>
+        </mc:Fallback>
+      </mc:AlternateContent>
+    </p:spTree>
+    <p:extLst>
+      <p:ext uri="{BB962C8B-B14F-4D97-AF65-F5344CB8AC3E}">
+        <p14:creationId xmlns:p14="http://schemas.microsoft.com/office/powerpoint/2010/main" val="2008547112"/>
+      </p:ext>
+    </p:extLst>
+  </p:cSld>
+  <p:clrMapOvr>
+    <a:masterClrMapping/>
+  </p:clrMapOvr>
+</p:sld>
+</file>
+
+<file path=ppt/slides/slide31.xml><?xml version="1.0" encoding="utf-8"?>
+<p:sld xmlns:a="http://schemas.openxmlformats.org/drawingml/2006/main" xmlns:r="http://schemas.openxmlformats.org/officeDocument/2006/relationships" xmlns:p="http://schemas.openxmlformats.org/presentationml/2006/main">
+  <p:cSld>
+    <p:spTree>
+      <p:nvGrpSpPr>
+        <p:cNvPr id="1" name=""/>
+        <p:cNvGrpSpPr/>
+        <p:nvPr/>
+      </p:nvGrpSpPr>
+      <p:grpSpPr>
+        <a:xfrm>
+          <a:off x="0" y="0"/>
+          <a:ext cx="0" cy="0"/>
+          <a:chOff x="0" y="0"/>
+          <a:chExt cx="0" cy="0"/>
+        </a:xfrm>
+      </p:grpSpPr>
+      <p:sp>
+        <p:nvSpPr>
+          <p:cNvPr id="2" name="Title 1">
+            <a:extLst>
+              <a:ext uri="{FF2B5EF4-FFF2-40B4-BE49-F238E27FC236}">
+                <a16:creationId xmlns:a16="http://schemas.microsoft.com/office/drawing/2014/main" id="{305C9347-D35D-8267-C6EF-A6AA84F3E612}"/>
+              </a:ext>
+            </a:extLst>
+          </p:cNvPr>
+          <p:cNvSpPr>
+            <a:spLocks noGrp="1"/>
+          </p:cNvSpPr>
+          <p:nvPr>
+            <p:ph type="title"/>
+          </p:nvPr>
+        </p:nvSpPr>
+        <p:spPr/>
+        <p:txBody>
+          <a:bodyPr/>
+          <a:lstStyle/>
+          <a:p>
+            <a:r>
+              <a:rPr lang="en-CA" dirty="0"/>
+              <a:t>Validity-Weighted Attenuation Cont.</a:t>
+            </a:r>
+          </a:p>
+        </p:txBody>
+      </p:sp>
+      <p:sp>
+        <p:nvSpPr>
+          <p:cNvPr id="3" name="Content Placeholder 2">
+            <a:extLst>
+              <a:ext uri="{FF2B5EF4-FFF2-40B4-BE49-F238E27FC236}">
+                <a16:creationId xmlns:a16="http://schemas.microsoft.com/office/drawing/2014/main" id="{6EE48612-80D8-00C5-BB5D-CE372029F897}"/>
+              </a:ext>
+            </a:extLst>
+          </p:cNvPr>
+          <p:cNvSpPr>
+            <a:spLocks noGrp="1"/>
+          </p:cNvSpPr>
+          <p:nvPr>
+            <p:ph idx="1"/>
+          </p:nvPr>
+        </p:nvSpPr>
+        <p:spPr/>
+        <p:txBody>
+          <a:bodyPr/>
+          <a:lstStyle/>
+          <a:p>
+            <a:r>
+              <a:rPr lang="en-CA" dirty="0"/>
+              <a:t>This “attenuated” feature vector is put back into the </a:t>
+            </a:r>
+            <a:r>
+              <a:rPr lang="en-CA" dirty="0" err="1"/>
+              <a:t>CatBoost</a:t>
+            </a:r>
+            <a:r>
+              <a:rPr lang="en-CA" dirty="0"/>
+              <a:t> model which predicts a new rating.</a:t>
+            </a:r>
+          </a:p>
+          <a:p>
+            <a:r>
+              <a:rPr lang="en-CA" dirty="0"/>
+              <a:t>Take the difference of the baseline prediction and attenuated prediction.</a:t>
+            </a:r>
+          </a:p>
+          <a:p>
+            <a:r>
+              <a:rPr lang="en-CA" dirty="0"/>
+              <a:t>Remove the model-estimated contribution of the down-weighted </a:t>
+            </a:r>
+            <a:r>
+              <a:rPr lang="en-CA" i="1" dirty="0" err="1"/>
+              <a:t>Misc</a:t>
+            </a:r>
+            <a:r>
+              <a:rPr lang="en-CA" dirty="0"/>
+              <a:t> emotion from the original student rating.</a:t>
+            </a:r>
+          </a:p>
+          <a:p>
+            <a:endParaRPr lang="en-CA" dirty="0"/>
+          </a:p>
+          <a:p>
+            <a:endParaRPr lang="en-CA" dirty="0"/>
+          </a:p>
+          <a:p>
+            <a:r>
+              <a:rPr lang="en-CA" dirty="0"/>
+              <a:t>Ta Da!</a:t>
+            </a:r>
+          </a:p>
+        </p:txBody>
+      </p:sp>
+      <p:pic>
+        <p:nvPicPr>
+          <p:cNvPr id="5" name="Picture 4">
+            <a:extLst>
+              <a:ext uri="{FF2B5EF4-FFF2-40B4-BE49-F238E27FC236}">
+                <a16:creationId xmlns:a16="http://schemas.microsoft.com/office/drawing/2014/main" id="{EB838C49-605D-5C75-F0FA-75FF3D4E5261}"/>
+              </a:ext>
+            </a:extLst>
+          </p:cNvPr>
+          <p:cNvPicPr>
+            <a:picLocks noChangeAspect="1"/>
+          </p:cNvPicPr>
+          <p:nvPr/>
+        </p:nvPicPr>
+        <p:blipFill>
+          <a:blip r:embed="rId2"/>
+          <a:stretch>
+            <a:fillRect/>
+          </a:stretch>
+        </p:blipFill>
+        <p:spPr>
+          <a:xfrm>
+            <a:off x="2575277" y="4698236"/>
+            <a:ext cx="6687483" cy="666843"/>
+          </a:xfrm>
+          <a:prstGeom prst="rect">
+            <a:avLst/>
+          </a:prstGeom>
+        </p:spPr>
+      </p:pic>
+    </p:spTree>
+    <p:extLst>
+      <p:ext uri="{BB962C8B-B14F-4D97-AF65-F5344CB8AC3E}">
+        <p14:creationId xmlns:p14="http://schemas.microsoft.com/office/powerpoint/2010/main" val="2366711829"/>
+      </p:ext>
+    </p:extLst>
+  </p:cSld>
+  <p:clrMapOvr>
+    <a:masterClrMapping/>
+  </p:clrMapOvr>
+</p:sld>
+</file>
+
+<file path=ppt/slides/slide32.xml><?xml version="1.0" encoding="utf-8"?>
+<p:sld xmlns:a="http://schemas.openxmlformats.org/drawingml/2006/main" xmlns:r="http://schemas.openxmlformats.org/officeDocument/2006/relationships" xmlns:p="http://schemas.openxmlformats.org/presentationml/2006/main">
+  <p:cSld>
+    <p:spTree>
+      <p:nvGrpSpPr>
+        <p:cNvPr id="1" name=""/>
+        <p:cNvGrpSpPr/>
+        <p:nvPr/>
+      </p:nvGrpSpPr>
+      <p:grpSpPr>
+        <a:xfrm>
+          <a:off x="0" y="0"/>
+          <a:ext cx="0" cy="0"/>
+          <a:chOff x="0" y="0"/>
+          <a:chExt cx="0" cy="0"/>
+        </a:xfrm>
+      </p:grpSpPr>
+      <p:sp>
+        <p:nvSpPr>
+          <p:cNvPr id="2" name="Title 1">
+            <a:extLst>
+              <a:ext uri="{FF2B5EF4-FFF2-40B4-BE49-F238E27FC236}">
+                <a16:creationId xmlns:a16="http://schemas.microsoft.com/office/drawing/2014/main" id="{68366AD5-3F16-D968-89B1-B0B62C1BD814}"/>
+              </a:ext>
+            </a:extLst>
+          </p:cNvPr>
+          <p:cNvSpPr>
+            <a:spLocks noGrp="1"/>
+          </p:cNvSpPr>
+          <p:nvPr>
+            <p:ph type="title"/>
+          </p:nvPr>
+        </p:nvSpPr>
+        <p:spPr/>
+        <p:txBody>
+          <a:bodyPr/>
+          <a:lstStyle/>
+          <a:p>
+            <a:endParaRPr lang="en-CA"/>
+          </a:p>
+        </p:txBody>
+      </p:sp>
+      <p:sp>
+        <p:nvSpPr>
+          <p:cNvPr id="3" name="Content Placeholder 2">
+            <a:extLst>
+              <a:ext uri="{FF2B5EF4-FFF2-40B4-BE49-F238E27FC236}">
+                <a16:creationId xmlns:a16="http://schemas.microsoft.com/office/drawing/2014/main" id="{10BEEE63-551A-B409-8BF3-C16DAB75676E}"/>
+              </a:ext>
+            </a:extLst>
+          </p:cNvPr>
+          <p:cNvSpPr>
+            <a:spLocks noGrp="1"/>
+          </p:cNvSpPr>
+          <p:nvPr>
+            <p:ph idx="1"/>
+          </p:nvPr>
+        </p:nvSpPr>
+        <p:spPr/>
+        <p:txBody>
+          <a:bodyPr/>
+          <a:lstStyle/>
+          <a:p>
+            <a:endParaRPr lang="en-CA"/>
+          </a:p>
+        </p:txBody>
+      </p:sp>
+    </p:spTree>
+    <p:extLst>
+      <p:ext uri="{BB962C8B-B14F-4D97-AF65-F5344CB8AC3E}">
+        <p14:creationId xmlns:p14="http://schemas.microsoft.com/office/powerpoint/2010/main" val="2919721624"/>
       </p:ext>
     </p:extLst>
   </p:cSld>
